--- a/classes/parte-0-fundamentos-y-prerrequisitos/011-protocolos-de-red-ip-tcp-udp-e-icmp-en-profundidad/clase-011-presentacion.pptx
+++ b/classes/parte-0-fundamentos-y-prerrequisitos/011-protocolos-de-red-ip-tcp-udp-e-icmp-en-profundidad/clase-011-presentacion.pptx
@@ -17,6 +17,9 @@
     <p:sldId id="265" r:id="rId16"/>
     <p:sldId id="266" r:id="rId17"/>
     <p:sldId id="267" r:id="rId18"/>
+    <p:sldId id="268" r:id="rId19"/>
+    <p:sldId id="269" r:id="rId20"/>
+    <p:sldId id="270" r:id="rId21"/>
   </p:sldIdLst>
   <p:sldSz cx="9144000" cy="6858000" type="screen4x3"/>
   <p:notesSz cx="6858000" cy="9144000"/>
@@ -3198,7 +3201,7 @@
                   <a:srgbClr val="0B3D2E"/>
                 </a:solidFill>
               </a:rPr>
-              <a:t>⚠️ Errores comunes</a:t>
+              <a:t>✍️ Ejercicios</a:t>
             </a:r>
           </a:p>
         </p:txBody>
@@ -3236,67 +3239,97 @@
                   <a:srgbClr val="22282E"/>
                 </a:solidFill>
               </a:rPr>
-              <a:t>•  Todos los puertos aparecen "filtered" — Un firewall descarta los paquetes. Ajusta el escenario o usa -Pn/timing distinto.</a:t>
-            </a:r>
-          </a:p>
-          <a:p>
-            <a:pPr>
-              <a:spcAft>
-                <a:spcPts val="600"/>
-              </a:spcAft>
-            </a:pPr>
-            <a:r>
-              <a:rPr sz="1500">
-                <a:solidFill>
-                  <a:srgbClr val="22282E"/>
-                </a:solidFill>
-              </a:rPr>
-              <a:t>•  nmap SYN scan requiere root — El SYN scan usa paquetes crudos. Ejecuta con sudo.</a:t>
-            </a:r>
-          </a:p>
-          <a:p>
-            <a:pPr>
-              <a:spcAft>
-                <a:spcPts val="600"/>
-              </a:spcAft>
-            </a:pPr>
-            <a:r>
-              <a:rPr sz="1500">
-                <a:solidFill>
-                  <a:srgbClr val="22282E"/>
-                </a:solidFill>
-              </a:rPr>
-              <a:t>•  UDP scan tarda muchísimo — Es normal: sin respuesta, nmap espera y reintenta. Limita puertos.</a:t>
-            </a:r>
-          </a:p>
-          <a:p>
-            <a:pPr>
-              <a:spcAft>
-                <a:spcPts val="600"/>
-              </a:spcAft>
-            </a:pPr>
-            <a:r>
-              <a:rPr sz="1500">
-                <a:solidFill>
-                  <a:srgbClr val="22282E"/>
-                </a:solidFill>
-              </a:rPr>
-              <a:t>•  Confundir puerto cerrado con filtrado — Cerrado responde (RST/ICMP); filtrado no responde. Distínguelos por la respuesta.</a:t>
-            </a:r>
-          </a:p>
-          <a:p>
-            <a:pPr>
-              <a:spcAft>
-                <a:spcPts val="600"/>
-              </a:spcAft>
-            </a:pPr>
-            <a:r>
-              <a:rPr sz="1500">
-                <a:solidFill>
-                  <a:srgbClr val="22282E"/>
-                </a:solidFill>
-              </a:rPr>
-              <a:t>•  TTL no coincide con el esperado — Hubo saltos intermedios (routers). Cuenta relativo al valor inicial típico.</a:t>
+              <a:t>•  Dibuja el three-way handshake indicando qué flag lleva cada paquete y cómo evolucionan seq y ack.</a:t>
+            </a:r>
+          </a:p>
+          <a:p>
+            <a:pPr>
+              <a:spcAft>
+                <a:spcPts val="600"/>
+              </a:spcAft>
+            </a:pPr>
+            <a:r>
+              <a:rPr sz="1500">
+                <a:solidFill>
+                  <a:srgbClr val="22282E"/>
+                </a:solidFill>
+              </a:rPr>
+              <a:t>•  Explica qué respuesta da un puerto TCP abierto, cerrado y filtrado ante un SYN scan, y por qué difieren.</a:t>
+            </a:r>
+          </a:p>
+          <a:p>
+            <a:pPr>
+              <a:spcAft>
+                <a:spcPts val="600"/>
+              </a:spcAft>
+            </a:pPr>
+            <a:r>
+              <a:rPr sz="1500">
+                <a:solidFill>
+                  <a:srgbClr val="22282E"/>
+                </a:solidFill>
+              </a:rPr>
+              <a:t>•  ¿Por qué el escaneo UDP es más lento y menos fiable que el TCP? Relaciónalo con la ausencia de handshake.</a:t>
+            </a:r>
+          </a:p>
+          <a:p>
+            <a:pPr>
+              <a:spcAft>
+                <a:spcPts val="600"/>
+              </a:spcAft>
+            </a:pPr>
+            <a:r>
+              <a:rPr sz="1500">
+                <a:solidFill>
+                  <a:srgbClr val="22282E"/>
+                </a:solidFill>
+              </a:rPr>
+              <a:t>•  Interpreta el campo TTL de tres capturas y estima el SO de origen y el número de saltos.</a:t>
+            </a:r>
+          </a:p>
+          <a:p>
+            <a:pPr>
+              <a:spcAft>
+                <a:spcPts val="600"/>
+              </a:spcAft>
+            </a:pPr>
+            <a:r>
+              <a:rPr sz="1500">
+                <a:solidFill>
+                  <a:srgbClr val="22282E"/>
+                </a:solidFill>
+              </a:rPr>
+              <a:t>•  Explica la diferencia entre -sS (SYN) y -sT (connect) en nmap y sus implicaciones de sigilo y de permisos.</a:t>
+            </a:r>
+          </a:p>
+          <a:p>
+            <a:pPr>
+              <a:spcAft>
+                <a:spcPts val="600"/>
+              </a:spcAft>
+            </a:pPr>
+            <a:r>
+              <a:rPr sz="1500">
+                <a:solidFill>
+                  <a:srgbClr val="22282E"/>
+                </a:solidFill>
+              </a:rPr>
+              <a:t>•  Describe cómo ICMP puede usarse para exfiltrar datos mediante un túnel y qué señales permitirían detectarlo.</a:t>
+            </a:r>
+          </a:p>
+          <a:p>
+            <a:pPr>
+              <a:spcAft>
+                <a:spcPts val="600"/>
+              </a:spcAft>
+            </a:pPr>
+            <a:r>
+              <a:rPr sz="1500">
+                <a:solidFill>
+                  <a:srgbClr val="22282E"/>
+                </a:solidFill>
+              </a:rPr>
+              <a:t>•  Justifica por qué bloquear todo ICMP en una red puede degradar el rendimiento (pista: Path MTU Discovery).</a:t>
             </a:r>
           </a:p>
         </p:txBody>
@@ -3347,7 +3380,7 @@
                   <a:srgbClr val="0B3D2E"/>
                 </a:solidFill>
               </a:rPr>
-              <a:t>❓ Preguntas frecuentes</a:t>
+              <a:t>📝 Reto verificable</a:t>
             </a:r>
           </a:p>
         </p:txBody>
@@ -3385,52 +3418,22 @@
                   <a:srgbClr val="22282E"/>
                 </a:solidFill>
               </a:rPr>
-              <a:t>•  ❓ ¿Por qué el SYN scan es "sigiloso"? Porque no completa el handshake (envía RST tras el SYN-ACK), por lo que muchas apps no registran la conexión. Aun así, los IDS modernos lo detectan.</a:t>
-            </a:r>
-          </a:p>
-          <a:p>
-            <a:pPr>
-              <a:spcAft>
-                <a:spcPts val="600"/>
-              </a:spcAft>
-            </a:pPr>
-            <a:r>
-              <a:rPr sz="1500">
-                <a:solidFill>
-                  <a:srgbClr val="22282E"/>
-                </a:solidFill>
-              </a:rPr>
-              <a:t>•  ❓ ¿UDP es "inseguro" por no tener handshake? No es inseguro por sí mismo; simplemente no garantiza entrega ni orden. Protocolos sobre UDP (DNS, QUIC) añaden sus propias garantías o cifrado.</a:t>
-            </a:r>
-          </a:p>
-          <a:p>
-            <a:pPr>
-              <a:spcAft>
-                <a:spcPts val="600"/>
-              </a:spcAft>
-            </a:pPr>
-            <a:r>
-              <a:rPr sz="1500">
-                <a:solidFill>
-                  <a:srgbClr val="22282E"/>
-                </a:solidFill>
-              </a:rPr>
-              <a:t>•  ❓ ¿Se puede bloquear todo ICMP sin consecuencias? No conviene: rompes diagnóstico (ping, PMTUD). Filtra selectivamente en lugar de bloquear ICMP por completo.</a:t>
-            </a:r>
-          </a:p>
-          <a:p>
-            <a:pPr>
-              <a:spcAft>
-                <a:spcPts val="600"/>
-              </a:spcAft>
-            </a:pPr>
-            <a:r>
-              <a:rPr sz="1500">
-                <a:solidFill>
-                  <a:srgbClr val="22282E"/>
-                </a:solidFill>
-              </a:rPr>
-              <a:t>•  ❓ ¿Los números de secuencia siguen siendo predecibles? Los SO modernos los aleatorizan (ISN), mitigando el spoofing clásico. Es un buen ejemplo de cómo una debilidad de diseño se corrige con el tiempo.</a:t>
+              <a:t>•  Realiza y documenta un escaneo comparativo contra tu VM víctima: un SYN scan y un connect scan sobre el mismo rango de puertos, capturando ambos en Wireshark. Entrega una tabla que muestre, para tres…</a:t>
+            </a:r>
+          </a:p>
+          <a:p>
+            <a:pPr>
+              <a:spcAft>
+                <a:spcPts val="600"/>
+              </a:spcAft>
+            </a:pPr>
+            <a:r>
+              <a:rPr sz="1500">
+                <a:solidFill>
+                  <a:srgbClr val="22282E"/>
+                </a:solidFill>
+              </a:rPr>
+              <a:t>•  Criterio de aceptación: la tabla refleja correctamente las respuestas (SYN-ACK / RST / sin respuesta) para cada puerto y explica por qué el SYN scan no completa el handshake mientras el connect sí lo…</a:t>
             </a:r>
           </a:p>
         </p:txBody>
@@ -3481,7 +3484,7 @@
                   <a:srgbClr val="0B3D2E"/>
                 </a:solidFill>
               </a:rPr>
-              <a:t>🔗 Referencias</a:t>
+              <a:t>⚠️ Errores comunes</a:t>
             </a:r>
           </a:p>
         </p:txBody>
@@ -3519,22 +3522,350 @@
                   <a:srgbClr val="22282E"/>
                 </a:solidFill>
               </a:rPr>
-              <a:t>•  RFC 791 (IP) — &lt;https://www.rfc-editor.org/rfc/rfc791&gt;</a:t>
-            </a:r>
-          </a:p>
-          <a:p>
-            <a:pPr>
-              <a:spcAft>
-                <a:spcPts val="600"/>
-              </a:spcAft>
-            </a:pPr>
-            <a:r>
-              <a:rPr sz="1500">
-                <a:solidFill>
-                  <a:srgbClr val="22282E"/>
-                </a:solidFill>
-              </a:rPr>
-              <a:t>•  RFC 793 (TCP) — &lt;https://www.rfc-editor.org/rfc/rfc793&gt;</a:t>
+              <a:t>•  Todos los puertos aparecen "filtered" — Un firewall descarta los paquetes. Ajusta el escenario o prueba -Pn y un timing distinto.</a:t>
+            </a:r>
+          </a:p>
+          <a:p>
+            <a:pPr>
+              <a:spcAft>
+                <a:spcPts val="600"/>
+              </a:spcAft>
+            </a:pPr>
+            <a:r>
+              <a:rPr sz="1500">
+                <a:solidFill>
+                  <a:srgbClr val="22282E"/>
+                </a:solidFill>
+              </a:rPr>
+              <a:t>•  nmap SYN scan requiere root — El SYN scan usa paquetes crudos. Ejecútalo con sudo.</a:t>
+            </a:r>
+          </a:p>
+          <a:p>
+            <a:pPr>
+              <a:spcAft>
+                <a:spcPts val="600"/>
+              </a:spcAft>
+            </a:pPr>
+            <a:r>
+              <a:rPr sz="1500">
+                <a:solidFill>
+                  <a:srgbClr val="22282E"/>
+                </a:solidFill>
+              </a:rPr>
+              <a:t>•  UDP scan tarda muchísimo — Es normal: ante el silencio, nmap espera y reintenta. Limita el número de puertos.</a:t>
+            </a:r>
+          </a:p>
+          <a:p>
+            <a:pPr>
+              <a:spcAft>
+                <a:spcPts val="600"/>
+              </a:spcAft>
+            </a:pPr>
+            <a:r>
+              <a:rPr sz="1500">
+                <a:solidFill>
+                  <a:srgbClr val="22282E"/>
+                </a:solidFill>
+              </a:rPr>
+              <a:t>•  Confundir puerto cerrado con filtrado — Cerrado responde (RST o ICMP); filtrado no responde. Distínguelos por la respuesta.</a:t>
+            </a:r>
+          </a:p>
+          <a:p>
+            <a:pPr>
+              <a:spcAft>
+                <a:spcPts val="600"/>
+              </a:spcAft>
+            </a:pPr>
+            <a:r>
+              <a:rPr sz="1500">
+                <a:solidFill>
+                  <a:srgbClr val="22282E"/>
+                </a:solidFill>
+              </a:rPr>
+              <a:t>•  TTL no coincide con el esperado — Hubo saltos intermedios (routers) que lo decrementaron. Razona relativo al valor inicial típico.</a:t>
+            </a:r>
+          </a:p>
+          <a:p>
+            <a:pPr>
+              <a:spcAft>
+                <a:spcPts val="600"/>
+              </a:spcAft>
+            </a:pPr>
+            <a:r>
+              <a:rPr sz="1500">
+                <a:solidFill>
+                  <a:srgbClr val="22282E"/>
+                </a:solidFill>
+              </a:rPr>
+              <a:t>•  No aparece el handshake en la captura — Filtro mal escrito o interfaz equivocada. Verifica con ip a y revisa el filtro de captura.</a:t>
+            </a:r>
+          </a:p>
+        </p:txBody>
+      </p:sp>
+    </p:spTree>
+  </p:cSld>
+  <p:clrMapOvr>
+    <a:masterClrMapping/>
+  </p:clrMapOvr>
+</p:sld>
+</file>
+
+<file path=ppt/slides/slide13.xml><?xml version="1.0" encoding="utf-8"?>
+<p:sld xmlns:a="http://schemas.openxmlformats.org/drawingml/2006/main" xmlns:p="http://schemas.openxmlformats.org/presentationml/2006/main" xmlns:r="http://schemas.openxmlformats.org/officeDocument/2006/relationships">
+  <p:cSld>
+    <p:spTree>
+      <p:nvGrpSpPr>
+        <p:cNvPr id="1" name=""/>
+        <p:cNvGrpSpPr/>
+        <p:nvPr/>
+      </p:nvGrpSpPr>
+      <p:grpSpPr/>
+      <p:sp>
+        <p:nvSpPr>
+          <p:cNvPr id="2" name="TextBox 1"/>
+          <p:cNvSpPr txBox="1"/>
+          <p:nvPr/>
+        </p:nvSpPr>
+        <p:spPr>
+          <a:xfrm>
+            <a:off x="457200" y="320040"/>
+            <a:ext cx="8229600" cy="822960"/>
+          </a:xfrm>
+          <a:prstGeom prst="rect">
+            <a:avLst/>
+          </a:prstGeom>
+          <a:noFill/>
+        </p:spPr>
+        <p:txBody>
+          <a:bodyPr wrap="square">
+            <a:spAutoFit/>
+          </a:bodyPr>
+          <a:lstStyle/>
+          <a:p>
+            <a:r>
+              <a:rPr sz="2600" b="1">
+                <a:solidFill>
+                  <a:srgbClr val="0B3D2E"/>
+                </a:solidFill>
+              </a:rPr>
+              <a:t>❓ Preguntas frecuentes</a:t>
+            </a:r>
+          </a:p>
+        </p:txBody>
+      </p:sp>
+      <p:sp>
+        <p:nvSpPr>
+          <p:cNvPr id="3" name="TextBox 2"/>
+          <p:cNvSpPr txBox="1"/>
+          <p:nvPr/>
+        </p:nvSpPr>
+        <p:spPr>
+          <a:xfrm>
+            <a:off x="457200" y="1280160"/>
+            <a:ext cx="8229600" cy="4937760"/>
+          </a:xfrm>
+          <a:prstGeom prst="rect">
+            <a:avLst/>
+          </a:prstGeom>
+          <a:noFill/>
+        </p:spPr>
+        <p:txBody>
+          <a:bodyPr wrap="square">
+            <a:spAutoFit/>
+          </a:bodyPr>
+          <a:lstStyle/>
+          <a:p>
+            <a:pPr>
+              <a:spcAft>
+                <a:spcPts val="600"/>
+              </a:spcAft>
+            </a:pPr>
+            <a:r>
+              <a:rPr sz="1500">
+                <a:solidFill>
+                  <a:srgbClr val="22282E"/>
+                </a:solidFill>
+              </a:rPr>
+              <a:t>•  ❓ ¿Por qué el SYN scan es "sigiloso"? Porque no completa el handshake: tras recibir el SYN-ACK envía un RST, por lo que históricamente muchas aplicaciones no llegaban a registrar la conexión. Aun…</a:t>
+            </a:r>
+          </a:p>
+          <a:p>
+            <a:pPr>
+              <a:spcAft>
+                <a:spcPts val="600"/>
+              </a:spcAft>
+            </a:pPr>
+            <a:r>
+              <a:rPr sz="1500">
+                <a:solidFill>
+                  <a:srgbClr val="22282E"/>
+                </a:solidFill>
+              </a:rPr>
+              <a:t>•  ❓ ¿UDP es "inseguro" por no tener handshake? No es inseguro en sí mismo; simplemente no garantiza entrega ni orden. Los protocolos que corren sobre UDP (DNS, QUIC) añaden sus propias garantías o…</a:t>
+            </a:r>
+          </a:p>
+          <a:p>
+            <a:pPr>
+              <a:spcAft>
+                <a:spcPts val="600"/>
+              </a:spcAft>
+            </a:pPr>
+            <a:r>
+              <a:rPr sz="1500">
+                <a:solidFill>
+                  <a:srgbClr val="22282E"/>
+                </a:solidFill>
+              </a:rPr>
+              <a:t>•  ❓ ¿Se puede bloquear todo ICMP sin consecuencias? No conviene: rompes el diagnóstico (ping) y el Path MTU Discovery, lo que puede degradar conexiones. Filtra selectivamente por tipo en lugar de…</a:t>
+            </a:r>
+          </a:p>
+          <a:p>
+            <a:pPr>
+              <a:spcAft>
+                <a:spcPts val="600"/>
+              </a:spcAft>
+            </a:pPr>
+            <a:r>
+              <a:rPr sz="1500">
+                <a:solidFill>
+                  <a:srgbClr val="22282E"/>
+                </a:solidFill>
+              </a:rPr>
+              <a:t>•  ❓ ¿Los números de secuencia siguen siendo predecibles? Los SO modernos los aleatorizan (ISN aleatorio), mitigando el spoofing e inyección clásicos. Es un buen ejemplo de cómo una debilidad de diseño…</a:t>
+            </a:r>
+          </a:p>
+        </p:txBody>
+      </p:sp>
+    </p:spTree>
+  </p:cSld>
+  <p:clrMapOvr>
+    <a:masterClrMapping/>
+  </p:clrMapOvr>
+</p:sld>
+</file>
+
+<file path=ppt/slides/slide14.xml><?xml version="1.0" encoding="utf-8"?>
+<p:sld xmlns:a="http://schemas.openxmlformats.org/drawingml/2006/main" xmlns:p="http://schemas.openxmlformats.org/presentationml/2006/main" xmlns:r="http://schemas.openxmlformats.org/officeDocument/2006/relationships">
+  <p:cSld>
+    <p:spTree>
+      <p:nvGrpSpPr>
+        <p:cNvPr id="1" name=""/>
+        <p:cNvGrpSpPr/>
+        <p:nvPr/>
+      </p:nvGrpSpPr>
+      <p:grpSpPr/>
+      <p:sp>
+        <p:nvSpPr>
+          <p:cNvPr id="2" name="TextBox 1"/>
+          <p:cNvSpPr txBox="1"/>
+          <p:nvPr/>
+        </p:nvSpPr>
+        <p:spPr>
+          <a:xfrm>
+            <a:off x="457200" y="320040"/>
+            <a:ext cx="8229600" cy="822960"/>
+          </a:xfrm>
+          <a:prstGeom prst="rect">
+            <a:avLst/>
+          </a:prstGeom>
+          <a:noFill/>
+        </p:spPr>
+        <p:txBody>
+          <a:bodyPr wrap="square">
+            <a:spAutoFit/>
+          </a:bodyPr>
+          <a:lstStyle/>
+          <a:p>
+            <a:r>
+              <a:rPr sz="2600" b="1">
+                <a:solidFill>
+                  <a:srgbClr val="0B3D2E"/>
+                </a:solidFill>
+              </a:rPr>
+              <a:t>🔗 Referencias</a:t>
+            </a:r>
+          </a:p>
+        </p:txBody>
+      </p:sp>
+      <p:sp>
+        <p:nvSpPr>
+          <p:cNvPr id="3" name="TextBox 2"/>
+          <p:cNvSpPr txBox="1"/>
+          <p:nvPr/>
+        </p:nvSpPr>
+        <p:spPr>
+          <a:xfrm>
+            <a:off x="457200" y="1280160"/>
+            <a:ext cx="8229600" cy="4937760"/>
+          </a:xfrm>
+          <a:prstGeom prst="rect">
+            <a:avLst/>
+          </a:prstGeom>
+          <a:noFill/>
+        </p:spPr>
+        <p:txBody>
+          <a:bodyPr wrap="square">
+            <a:spAutoFit/>
+          </a:bodyPr>
+          <a:lstStyle/>
+          <a:p>
+            <a:pPr>
+              <a:spcAft>
+                <a:spcPts val="600"/>
+              </a:spcAft>
+            </a:pPr>
+            <a:r>
+              <a:rPr sz="1500">
+                <a:solidFill>
+                  <a:srgbClr val="22282E"/>
+                </a:solidFill>
+              </a:rPr>
+              <a:t>•  RFC 791 (Internet Protocol) — &lt;https://www.rfc-editor.org/rfc/rfc791&gt;</a:t>
+            </a:r>
+          </a:p>
+          <a:p>
+            <a:pPr>
+              <a:spcAft>
+                <a:spcPts val="600"/>
+              </a:spcAft>
+            </a:pPr>
+            <a:r>
+              <a:rPr sz="1500">
+                <a:solidFill>
+                  <a:srgbClr val="22282E"/>
+                </a:solidFill>
+              </a:rPr>
+              <a:t>•  RFC 793 (Transmission Control Protocol) — &lt;https://www.rfc-editor.org/rfc/rfc793&gt;</a:t>
+            </a:r>
+          </a:p>
+          <a:p>
+            <a:pPr>
+              <a:spcAft>
+                <a:spcPts val="600"/>
+              </a:spcAft>
+            </a:pPr>
+            <a:r>
+              <a:rPr sz="1500">
+                <a:solidFill>
+                  <a:srgbClr val="22282E"/>
+                </a:solidFill>
+              </a:rPr>
+              <a:t>•  RFC 768 (User Datagram Protocol) — &lt;https://www.rfc-editor.org/rfc/rfc768&gt;</a:t>
+            </a:r>
+          </a:p>
+          <a:p>
+            <a:pPr>
+              <a:spcAft>
+                <a:spcPts val="600"/>
+              </a:spcAft>
+            </a:pPr>
+            <a:r>
+              <a:rPr sz="1500">
+                <a:solidFill>
+                  <a:srgbClr val="22282E"/>
+                </a:solidFill>
+              </a:rPr>
+              <a:t>•  RFC 792 (Internet Control Message Protocol) — &lt;https://www.rfc-editor.org/rfc/rfc792&gt;</a:t>
             </a:r>
           </a:p>
           <a:p>
@@ -3569,6 +3900,81 @@
           </a:p>
         </p:txBody>
       </p:sp>
+    </p:spTree>
+  </p:cSld>
+  <p:clrMapOvr>
+    <a:masterClrMapping/>
+  </p:clrMapOvr>
+</p:sld>
+</file>
+
+<file path=ppt/slides/slide15.xml><?xml version="1.0" encoding="utf-8"?>
+<p:sld xmlns:a="http://schemas.openxmlformats.org/drawingml/2006/main" xmlns:p="http://schemas.openxmlformats.org/presentationml/2006/main" xmlns:r="http://schemas.openxmlformats.org/officeDocument/2006/relationships">
+  <p:cSld>
+    <p:spTree>
+      <p:nvGrpSpPr>
+        <p:cNvPr id="1" name=""/>
+        <p:cNvGrpSpPr/>
+        <p:nvPr/>
+      </p:nvGrpSpPr>
+      <p:grpSpPr/>
+      <p:sp>
+        <p:nvSpPr>
+          <p:cNvPr id="2" name="TextBox 1"/>
+          <p:cNvSpPr txBox="1"/>
+          <p:nvPr/>
+        </p:nvSpPr>
+        <p:spPr>
+          <a:xfrm>
+            <a:off x="457200" y="274320"/>
+            <a:ext cx="8229600" cy="640080"/>
+          </a:xfrm>
+          <a:prstGeom prst="rect">
+            <a:avLst/>
+          </a:prstGeom>
+          <a:noFill/>
+        </p:spPr>
+        <p:txBody>
+          <a:bodyPr wrap="square">
+            <a:spAutoFit/>
+          </a:bodyPr>
+          <a:lstStyle/>
+          <a:p>
+            <a:r>
+              <a:rPr sz="2200" b="1">
+                <a:solidFill>
+                  <a:srgbClr val="0B3D2E"/>
+                </a:solidFill>
+              </a:rPr>
+              <a:t>Diagrama de la clase</a:t>
+            </a:r>
+          </a:p>
+        </p:txBody>
+      </p:sp>
+      <p:pic>
+        <p:nvPicPr>
+          <p:cNvPr id="3" name="Picture 2" descr="3bf6afdd1a5ff58d.png"/>
+          <p:cNvPicPr>
+            <a:picLocks noChangeAspect="1"/>
+          </p:cNvPicPr>
+          <p:nvPr/>
+        </p:nvPicPr>
+        <p:blipFill>
+          <a:blip r:embed="rId2"/>
+          <a:stretch>
+            <a:fillRect/>
+          </a:stretch>
+        </p:blipFill>
+        <p:spPr>
+          <a:xfrm>
+            <a:off x="2241944" y="1097280"/>
+            <a:ext cx="4660112" cy="5303520"/>
+          </a:xfrm>
+          <a:prstGeom prst="rect">
+            <a:avLst/>
+          </a:prstGeom>
+        </p:spPr>
+      </p:pic>
     </p:spTree>
   </p:cSld>
   <p:clrMapOvr>
@@ -3653,7 +4059,7 @@
                   <a:srgbClr val="22282E"/>
                 </a:solidFill>
               </a:rPr>
-              <a:t>•  Conocer al detalle los protocolos que mueven Internet: cómo se estructuran sus cabeceras, cómo TCP establece y cierra conexiones, en qué se diferencia UDP y para qué sirve ICMP. Este conocimiento es la base del escaneo de puertos, la detección de intrusiones y muchos ataques de red.</a:t>
+              <a:t>•  Conocer al detalle los protocolos que mueven Internet: cómo se estructuran sus cabeceras bit a bit, cómo TCP establece, mantiene y cierra una conexión fiable, en qué se diferencia radicalmente UDP y…</a:t>
             </a:r>
           </a:p>
         </p:txBody>
@@ -3757,67 +4163,82 @@
                   <a:srgbClr val="22282E"/>
                 </a:solidFill>
               </a:rPr>
-              <a:t>•  Interpretar los campos clave de las cabeceras IP, TCP, UDP e ICMP.</a:t>
-            </a:r>
-          </a:p>
-          <a:p>
-            <a:pPr>
-              <a:spcAft>
-                <a:spcPts val="600"/>
-              </a:spcAft>
-            </a:pPr>
-            <a:r>
-              <a:rPr sz="1500">
-                <a:solidFill>
-                  <a:srgbClr val="22282E"/>
-                </a:solidFill>
-              </a:rPr>
-              <a:t>•  Explicar el three-way handshake y el cierre de conexión TCP.</a:t>
-            </a:r>
-          </a:p>
-          <a:p>
-            <a:pPr>
-              <a:spcAft>
-                <a:spcPts val="600"/>
-              </a:spcAft>
-            </a:pPr>
-            <a:r>
-              <a:rPr sz="1500">
-                <a:solidFill>
-                  <a:srgbClr val="22282E"/>
-                </a:solidFill>
-              </a:rPr>
-              <a:t>•  Distinguir TCP de UDP y cuándo se usa cada uno.</a:t>
-            </a:r>
-          </a:p>
-          <a:p>
-            <a:pPr>
-              <a:spcAft>
-                <a:spcPts val="600"/>
-              </a:spcAft>
-            </a:pPr>
-            <a:r>
-              <a:rPr sz="1500">
-                <a:solidFill>
-                  <a:srgbClr val="22282E"/>
-                </a:solidFill>
-              </a:rPr>
-              <a:t>•  Relacionar flags y estados TCP con técnicas de escaneo.</a:t>
-            </a:r>
-          </a:p>
-          <a:p>
-            <a:pPr>
-              <a:spcAft>
-                <a:spcPts val="600"/>
-              </a:spcAft>
-            </a:pPr>
-            <a:r>
-              <a:rPr sz="1500">
-                <a:solidFill>
-                  <a:srgbClr val="22282E"/>
-                </a:solidFill>
-              </a:rPr>
-              <a:t>•  Analizar una conversación real en Wireshark.</a:t>
+              <a:t>•  Interpretar los campos clave de las cabeceras IP, TCP, UDP e ICMP y explicar su función.</a:t>
+            </a:r>
+          </a:p>
+          <a:p>
+            <a:pPr>
+              <a:spcAft>
+                <a:spcPts val="600"/>
+              </a:spcAft>
+            </a:pPr>
+            <a:r>
+              <a:rPr sz="1500">
+                <a:solidFill>
+                  <a:srgbClr val="22282E"/>
+                </a:solidFill>
+              </a:rPr>
+              <a:t>•  Explicar el three-way handshake, el control de flujo por ventana y el cierre ordenado o abrupto de una conexión TCP.</a:t>
+            </a:r>
+          </a:p>
+          <a:p>
+            <a:pPr>
+              <a:spcAft>
+                <a:spcPts val="600"/>
+              </a:spcAft>
+            </a:pPr>
+            <a:r>
+              <a:rPr sz="1500">
+                <a:solidFill>
+                  <a:srgbClr val="22282E"/>
+                </a:solidFill>
+              </a:rPr>
+              <a:t>•  Distinguir TCP de UDP y justificar cuándo el diseño de un protocolo elige cada uno.</a:t>
+            </a:r>
+          </a:p>
+          <a:p>
+            <a:pPr>
+              <a:spcAft>
+                <a:spcPts val="600"/>
+              </a:spcAft>
+            </a:pPr>
+            <a:r>
+              <a:rPr sz="1500">
+                <a:solidFill>
+                  <a:srgbClr val="22282E"/>
+                </a:solidFill>
+              </a:rPr>
+              <a:t>•  Relacionar flags y estados TCP con las técnicas de escaneo (SYN, connect, FIN, UDP).</a:t>
+            </a:r>
+          </a:p>
+          <a:p>
+            <a:pPr>
+              <a:spcAft>
+                <a:spcPts val="600"/>
+              </a:spcAft>
+            </a:pPr>
+            <a:r>
+              <a:rPr sz="1500">
+                <a:solidFill>
+                  <a:srgbClr val="22282E"/>
+                </a:solidFill>
+              </a:rPr>
+              <a:t>•  Analizar una conversación real en Wireshark, identificando fases y anomalías.</a:t>
+            </a:r>
+          </a:p>
+          <a:p>
+            <a:pPr>
+              <a:spcAft>
+                <a:spcPts val="600"/>
+              </a:spcAft>
+            </a:pPr>
+            <a:r>
+              <a:rPr sz="1500">
+                <a:solidFill>
+                  <a:srgbClr val="22282E"/>
+                </a:solidFill>
+              </a:rPr>
+              <a:t>•  Reconocer cómo ICMP y ciertos campos IP se abusan para evasión, fingerprinting y exfiltración.</a:t>
             </a:r>
           </a:p>
         </p:txBody>
@@ -4047,7 +4468,7 @@
                   <a:srgbClr val="0B3D2E"/>
                 </a:solidFill>
               </a:rPr>
-              <a:t>📖 Definiciones y características</a:t>
+              <a:t>🧠 Explicación en profundidad</a:t>
             </a:r>
           </a:p>
         </p:txBody>
@@ -4085,82 +4506,97 @@
                   <a:srgbClr val="22282E"/>
                 </a:solidFill>
               </a:rPr>
-              <a:t>•  TTL (Time To Live): contador de saltos en la cabecera IP; cada router lo decrementa. Clave: a 0 se descarta y se usa en traceroute y para inferir el SO.</a:t>
-            </a:r>
-          </a:p>
-          <a:p>
-            <a:pPr>
-              <a:spcAft>
-                <a:spcPts val="600"/>
-              </a:spcAft>
-            </a:pPr>
-            <a:r>
-              <a:rPr sz="1500">
-                <a:solidFill>
-                  <a:srgbClr val="22282E"/>
-                </a:solidFill>
-              </a:rPr>
-              <a:t>•  Three-way handshake: SYN → SYN-ACK → ACK que abre una conexión TCP. Clave: base del connect scan y del SYN flood.</a:t>
-            </a:r>
-          </a:p>
-          <a:p>
-            <a:pPr>
-              <a:spcAft>
-                <a:spcPts val="600"/>
-              </a:spcAft>
-            </a:pPr>
-            <a:r>
-              <a:rPr sz="1500">
-                <a:solidFill>
-                  <a:srgbClr val="22282E"/>
-                </a:solidFill>
-              </a:rPr>
-              <a:t>•  Flag RST: reinicio abrupto de conexión. Clave: un puerto TCP cerrado responde con RST; así el escáner sabe que está cerrado.</a:t>
-            </a:r>
-          </a:p>
-          <a:p>
-            <a:pPr>
-              <a:spcAft>
-                <a:spcPts val="600"/>
-              </a:spcAft>
-            </a:pPr>
-            <a:r>
-              <a:rPr sz="1500">
-                <a:solidFill>
-                  <a:srgbClr val="22282E"/>
-                </a:solidFill>
-              </a:rPr>
-              <a:t>•  UDP: transporte sin conexión ni garantías. Clave: rápido, sin handshake; DNS, DHCP, VoIP lo usan.</a:t>
-            </a:r>
-          </a:p>
-          <a:p>
-            <a:pPr>
-              <a:spcAft>
-                <a:spcPts val="600"/>
-              </a:spcAft>
-            </a:pPr>
-            <a:r>
-              <a:rPr sz="1500">
-                <a:solidFill>
-                  <a:srgbClr val="22282E"/>
-                </a:solidFill>
-              </a:rPr>
-              <a:t>•  ICMP: protocolo de control/diagnóstico (echo request/reply, unreachable). Clave: ping y traceroute; también usado para túneles y exfiltración.</a:t>
-            </a:r>
-          </a:p>
-          <a:p>
-            <a:pPr>
-              <a:spcAft>
-                <a:spcPts val="600"/>
-              </a:spcAft>
-            </a:pPr>
-            <a:r>
-              <a:rPr sz="1500">
-                <a:solidFill>
-                  <a:srgbClr val="22282E"/>
-                </a:solidFill>
-              </a:rPr>
-              <a:t>•  Número de secuencia: identifica la posición de los bytes en el flujo TCP. Clave: su predictibilidad histórica permitió ataques de spoofing.</a:t>
+              <a:t>•  Cada paquete que sale de tu máquina lleva delante una cabecera IP de 20 bytes (sin opciones) que actúa como el sobre postal del envío: contiene la dirección de origen y destino, pero también…</a:t>
+            </a:r>
+          </a:p>
+          <a:p>
+            <a:pPr>
+              <a:spcAft>
+                <a:spcPts val="600"/>
+              </a:spcAft>
+            </a:pPr>
+            <a:r>
+              <a:rPr sz="1500">
+                <a:solidFill>
+                  <a:srgbClr val="22282E"/>
+                </a:solidFill>
+              </a:rPr>
+              <a:t>•  El detalle importante es que IP es un protocolo best-effort: no garantiza entrega, ni orden, ni ausencia de duplicados. Toda la fiabilidad que asociamos a Internet vive una capa más arriba, en TCP.…</a:t>
+            </a:r>
+          </a:p>
+          <a:p>
+            <a:pPr>
+              <a:spcAft>
+                <a:spcPts val="600"/>
+              </a:spcAft>
+            </a:pPr>
+            <a:r>
+              <a:rPr sz="1500">
+                <a:solidFill>
+                  <a:srgbClr val="22282E"/>
+                </a:solidFill>
+              </a:rPr>
+              <a:t>•  TCP toma el canal caótico de IP y construye encima una ilusión perfecta: un flujo de bytes ordenado, sin pérdidas ni duplicados, entre dos extremos. Lo consigue con tres ideas: números de secuencia…</a:t>
+            </a:r>
+          </a:p>
+          <a:p>
+            <a:pPr>
+              <a:spcAft>
+                <a:spcPts val="600"/>
+              </a:spcAft>
+            </a:pPr>
+            <a:r>
+              <a:rPr sz="1500">
+                <a:solidFill>
+                  <a:srgbClr val="22282E"/>
+                </a:solidFill>
+              </a:rPr>
+              <a:t>•  Todo empieza con el three-way handshake. El cliente envía un segmento con el flag SYN y un número de secuencia inicial (ISN) aleatorio; el servidor responde SYN-ACK, confirmando el SYN del cliente y…</a:t>
+            </a:r>
+          </a:p>
+          <a:p>
+            <a:pPr>
+              <a:spcAft>
+                <a:spcPts val="600"/>
+              </a:spcAft>
+            </a:pPr>
+            <a:r>
+              <a:rPr sz="1500">
+                <a:solidFill>
+                  <a:srgbClr val="22282E"/>
+                </a:solidFill>
+              </a:rPr>
+              <a:t>•  Los flags de la cabecera TCP son bits que cambian el significado de un segmento. SYN inicia; ACK confirma; FIN pide cerrar de forma ordenada; RST aborta de golpe (sin negociación); PSH pide entrega…</a:t>
+            </a:r>
+          </a:p>
+          <a:p>
+            <a:pPr>
+              <a:spcAft>
+                <a:spcPts val="600"/>
+              </a:spcAft>
+            </a:pPr>
+            <a:r>
+              <a:rPr sz="1500">
+                <a:solidFill>
+                  <a:srgbClr val="22282E"/>
+                </a:solidFill>
+              </a:rPr>
+              <a:t>•  Detrás de esos flags hay una máquina de estados. Una conexión transita por LISTEN, SYN-SENT, SYN-RECEIVED, ESTABLISHED, y al cerrar pasa por FIN-WAIT, CLOSE-WAIT y el célebre TIMEWAIT, un estado de…</a:t>
+            </a:r>
+          </a:p>
+          <a:p>
+            <a:pPr>
+              <a:spcAft>
+                <a:spcPts val="600"/>
+              </a:spcAft>
+            </a:pPr>
+            <a:r>
+              <a:rPr sz="1500">
+                <a:solidFill>
+                  <a:srgbClr val="22282E"/>
+                </a:solidFill>
+              </a:rPr>
+              <a:t>•  UDP es lo opuesto a TCP: cabecera de 8 bytes, sin handshake, sin números de secuencia, sin retransmisión. Envías un datagrama y esperas lo mejor. Esa simplicidad es una virtud cuando la latencia…</a:t>
             </a:r>
           </a:p>
         </p:txBody>
@@ -4211,7 +4647,7 @@
                   <a:srgbClr val="0B3D2E"/>
                 </a:solidFill>
               </a:rPr>
-              <a:t>🧰 Herramientas y preparación</a:t>
+              <a:t>📖 Definiciones y características</a:t>
             </a:r>
           </a:p>
         </p:txBody>
@@ -4249,7 +4685,97 @@
                   <a:srgbClr val="22282E"/>
                 </a:solidFill>
               </a:rPr>
-              <a:t>•  Usa Wireshark, tcpdump, y nmap en tu laboratorio aislado. Para generar tráfico controlado, curl, ping, nc. Conviene tener a la vista los diagramas de cabecera de los RFC 791 (IP) y 793 (TCP).</a:t>
+              <a:t>•  TTL (Time To Live): contador de saltos en la cabecera IP que cada router decrementa; al llegar a cero el paquete se descarta con un ICMP "Time Exceeded". Es el motor de traceroute y, como los…</a:t>
+            </a:r>
+          </a:p>
+          <a:p>
+            <a:pPr>
+              <a:spcAft>
+                <a:spcPts val="600"/>
+              </a:spcAft>
+            </a:pPr>
+            <a:r>
+              <a:rPr sz="1500">
+                <a:solidFill>
+                  <a:srgbClr val="22282E"/>
+                </a:solidFill>
+              </a:rPr>
+              <a:t>•  Three-way handshake: secuencia SYN → SYN-ACK → ACK que abre toda conexión TCP e intercambia los números de secuencia iniciales. Es la base del connect scan, y su saturación es lo que provoca el…</a:t>
+            </a:r>
+          </a:p>
+          <a:p>
+            <a:pPr>
+              <a:spcAft>
+                <a:spcPts val="600"/>
+              </a:spcAft>
+            </a:pPr>
+            <a:r>
+              <a:rPr sz="1500">
+                <a:solidFill>
+                  <a:srgbClr val="22282E"/>
+                </a:solidFill>
+              </a:rPr>
+              <a:t>•  Flag RST: bit que aborta una conexión de forma inmediata, sin negociación. Un puerto TCP cerrado responde con RST a un SYN, y esa respuesta es exactamente lo que le dice al escáner que el puerto no…</a:t>
+            </a:r>
+          </a:p>
+          <a:p>
+            <a:pPr>
+              <a:spcAft>
+                <a:spcPts val="600"/>
+              </a:spcAft>
+            </a:pPr>
+            <a:r>
+              <a:rPr sz="1500">
+                <a:solidFill>
+                  <a:srgbClr val="22282E"/>
+                </a:solidFill>
+              </a:rPr>
+              <a:t>•  Número de secuencia (ISN): identifica la posición de cada byte en el flujo TCP. Su predictibilidad en implementaciones antiguas permitió ataques de spoofing e inyección; los SO modernos lo…</a:t>
+            </a:r>
+          </a:p>
+          <a:p>
+            <a:pPr>
+              <a:spcAft>
+                <a:spcPts val="600"/>
+              </a:spcAft>
+            </a:pPr>
+            <a:r>
+              <a:rPr sz="1500">
+                <a:solidFill>
+                  <a:srgbClr val="22282E"/>
+                </a:solidFill>
+              </a:rPr>
+              <a:t>•  Ventana (window): campo que anuncia cuántos bytes puede recibir el extremo sin desbordar su buffer. Implementa el control de flujo y evita que un emisor rápido ahogue a un receptor lento.</a:t>
+            </a:r>
+          </a:p>
+          <a:p>
+            <a:pPr>
+              <a:spcAft>
+                <a:spcPts val="600"/>
+              </a:spcAft>
+            </a:pPr>
+            <a:r>
+              <a:rPr sz="1500">
+                <a:solidFill>
+                  <a:srgbClr val="22282E"/>
+                </a:solidFill>
+              </a:rPr>
+              <a:t>•  UDP: transporte sin conexión, sin orden ni garantías, con cabecera de solo 8 bytes. Su ligereza lo hace ideal para DNS, DHCP, VoIP y QUIC, pero también para ataques de amplificación por su falta de…</a:t>
+            </a:r>
+          </a:p>
+          <a:p>
+            <a:pPr>
+              <a:spcAft>
+                <a:spcPts val="600"/>
+              </a:spcAft>
+            </a:pPr>
+            <a:r>
+              <a:rPr sz="1500">
+                <a:solidFill>
+                  <a:srgbClr val="22282E"/>
+                </a:solidFill>
+              </a:rPr>
+              <a:t>•  ICMP: protocolo de control y diagnóstico de IP (echo, unreachable, time exceeded). Sostiene ping y traceroute; su payload también sirve como canal encubierto para túneles y exfiltración.</a:t>
             </a:r>
           </a:p>
         </p:txBody>
@@ -4300,7 +4826,7 @@
                   <a:srgbClr val="0B3D2E"/>
                 </a:solidFill>
               </a:rPr>
-              <a:t>🧪 Laboratorio guiado</a:t>
+              <a:t>📔 Glosario</a:t>
             </a:r>
           </a:p>
         </p:txBody>
@@ -4338,97 +4864,97 @@
                   <a:srgbClr val="22282E"/>
                 </a:solidFill>
               </a:rPr>
-              <a:t>•  Capturar un handshake. En Kali, arranca la captura y luego conéctate a un servicio de la víctima:</a:t>
-            </a:r>
-          </a:p>
-          <a:p>
-            <a:pPr>
-              <a:spcAft>
-                <a:spcPts val="600"/>
-              </a:spcAft>
-            </a:pPr>
-            <a:r>
-              <a:rPr sz="1500">
-                <a:solidFill>
-                  <a:srgbClr val="22282E"/>
-                </a:solidFill>
-              </a:rPr>
-              <a:t>•  sudo tcpdump -i eth0 -n 'tcp and host 10.10.10.6' -w tcp.pcap &amp;</a:t>
-            </a:r>
-          </a:p>
-          <a:p>
-            <a:pPr>
-              <a:spcAft>
-                <a:spcPts val="600"/>
-              </a:spcAft>
-            </a:pPr>
-            <a:r>
-              <a:rPr sz="1500">
-                <a:solidFill>
-                  <a:srgbClr val="22282E"/>
-                </a:solidFill>
-              </a:rPr>
-              <a:t>•  curl http://10.10.10.6/ ; sudo pkill tcpdump</a:t>
-            </a:r>
-          </a:p>
-          <a:p>
-            <a:pPr>
-              <a:spcAft>
-                <a:spcPts val="600"/>
-              </a:spcAft>
-            </a:pPr>
-            <a:r>
-              <a:rPr sz="1500">
-                <a:solidFill>
-                  <a:srgbClr val="22282E"/>
-                </a:solidFill>
-              </a:rPr>
-              <a:t>•  Analiza en Wireshark el filtro tcp.flags.syn == 1. Identifica SYN, SYN-ACK y ACK y anota números de secuencia y puertos.</a:t>
-            </a:r>
-          </a:p>
-          <a:p>
-            <a:pPr>
-              <a:spcAft>
-                <a:spcPts val="600"/>
-              </a:spcAft>
-            </a:pPr>
-            <a:r>
-              <a:rPr sz="1500">
-                <a:solidFill>
-                  <a:srgbClr val="22282E"/>
-                </a:solidFill>
-              </a:rPr>
-              <a:t>•  Cierre de conexión. Localiza los paquetes FIN/ACK (o RST) al final de la conversación.</a:t>
-            </a:r>
-          </a:p>
-          <a:p>
-            <a:pPr>
-              <a:spcAft>
-                <a:spcPts val="600"/>
-              </a:spcAft>
-            </a:pPr>
-            <a:r>
-              <a:rPr sz="1500">
-                <a:solidFill>
-                  <a:srgbClr val="22282E"/>
-                </a:solidFill>
-              </a:rPr>
-              <a:t>•  Escaneo SYN (half-open) contra tu víctima:</a:t>
-            </a:r>
-          </a:p>
-          <a:p>
-            <a:pPr>
-              <a:spcAft>
-                <a:spcPts val="600"/>
-              </a:spcAft>
-            </a:pPr>
-            <a:r>
-              <a:rPr sz="1500">
-                <a:solidFill>
-                  <a:srgbClr val="22282E"/>
-                </a:solidFill>
-              </a:rPr>
-              <a:t>•  sudo nmap -sS -p 1-1000 10.10.10.6</a:t>
+              <a:t>•  Término — Definición concisa</a:t>
+            </a:r>
+          </a:p>
+          <a:p>
+            <a:pPr>
+              <a:spcAft>
+                <a:spcPts val="600"/>
+              </a:spcAft>
+            </a:pPr>
+            <a:r>
+              <a:rPr sz="1500">
+                <a:solidFill>
+                  <a:srgbClr val="22282E"/>
+                </a:solidFill>
+              </a:rPr>
+              <a:t>•  IP — Protocolo de red best-effort que direcciona y enruta paquetes sin garantías.</a:t>
+            </a:r>
+          </a:p>
+          <a:p>
+            <a:pPr>
+              <a:spcAft>
+                <a:spcPts val="600"/>
+              </a:spcAft>
+            </a:pPr>
+            <a:r>
+              <a:rPr sz="1500">
+                <a:solidFill>
+                  <a:srgbClr val="22282E"/>
+                </a:solidFill>
+              </a:rPr>
+              <a:t>•  TCP — Transporte fiable orientado a conexión: orden, retransmisión y control de flujo.</a:t>
+            </a:r>
+          </a:p>
+          <a:p>
+            <a:pPr>
+              <a:spcAft>
+                <a:spcPts val="600"/>
+              </a:spcAft>
+            </a:pPr>
+            <a:r>
+              <a:rPr sz="1500">
+                <a:solidFill>
+                  <a:srgbClr val="22282E"/>
+                </a:solidFill>
+              </a:rPr>
+              <a:t>•  UDP — Transporte sin conexión, rápido y sin garantías de entrega ni orden.</a:t>
+            </a:r>
+          </a:p>
+          <a:p>
+            <a:pPr>
+              <a:spcAft>
+                <a:spcPts val="600"/>
+              </a:spcAft>
+            </a:pPr>
+            <a:r>
+              <a:rPr sz="1500">
+                <a:solidFill>
+                  <a:srgbClr val="22282E"/>
+                </a:solidFill>
+              </a:rPr>
+              <a:t>•  ICMP — Protocolo de control y diagnóstico de IP (ping, traceroute, errores).</a:t>
+            </a:r>
+          </a:p>
+          <a:p>
+            <a:pPr>
+              <a:spcAft>
+                <a:spcPts val="600"/>
+              </a:spcAft>
+            </a:pPr>
+            <a:r>
+              <a:rPr sz="1500">
+                <a:solidFill>
+                  <a:srgbClr val="22282E"/>
+                </a:solidFill>
+              </a:rPr>
+              <a:t>•  TTL — Contador de saltos que evita bucles y sirve para fingerprinting.</a:t>
+            </a:r>
+          </a:p>
+          <a:p>
+            <a:pPr>
+              <a:spcAft>
+                <a:spcPts val="600"/>
+              </a:spcAft>
+            </a:pPr>
+            <a:r>
+              <a:rPr sz="1500">
+                <a:solidFill>
+                  <a:srgbClr val="22282E"/>
+                </a:solidFill>
+              </a:rPr>
+              <a:t>•  ISN — Número de secuencia inicial aleatorio que abre una conexión TCP.</a:t>
             </a:r>
           </a:p>
         </p:txBody>
@@ -4479,7 +5005,7 @@
                   <a:srgbClr val="0B3D2E"/>
                 </a:solidFill>
               </a:rPr>
-              <a:t>✍️ Ejercicios</a:t>
+              <a:t>🧰 Herramientas y preparación</a:t>
             </a:r>
           </a:p>
         </p:txBody>
@@ -4517,82 +5043,7 @@
                   <a:srgbClr val="22282E"/>
                 </a:solidFill>
               </a:rPr>
-              <a:t>•  Dibuja el three-way handshake indicando qué flag lleva cada paquete.</a:t>
-            </a:r>
-          </a:p>
-          <a:p>
-            <a:pPr>
-              <a:spcAft>
-                <a:spcPts val="600"/>
-              </a:spcAft>
-            </a:pPr>
-            <a:r>
-              <a:rPr sz="1500">
-                <a:solidFill>
-                  <a:srgbClr val="22282E"/>
-                </a:solidFill>
-              </a:rPr>
-              <a:t>•  Explica qué respuesta da un puerto TCP abierto, cerrado y filtrado ante un SYN scan.</a:t>
-            </a:r>
-          </a:p>
-          <a:p>
-            <a:pPr>
-              <a:spcAft>
-                <a:spcPts val="600"/>
-              </a:spcAft>
-            </a:pPr>
-            <a:r>
-              <a:rPr sz="1500">
-                <a:solidFill>
-                  <a:srgbClr val="22282E"/>
-                </a:solidFill>
-              </a:rPr>
-              <a:t>•  ¿Por qué el escaneo UDP es más lento y menos fiable que el TCP?</a:t>
-            </a:r>
-          </a:p>
-          <a:p>
-            <a:pPr>
-              <a:spcAft>
-                <a:spcPts val="600"/>
-              </a:spcAft>
-            </a:pPr>
-            <a:r>
-              <a:rPr sz="1500">
-                <a:solidFill>
-                  <a:srgbClr val="22282E"/>
-                </a:solidFill>
-              </a:rPr>
-              <a:t>•  Interpreta el campo TTL de tres capturas y estima el SO de origen.</a:t>
-            </a:r>
-          </a:p>
-          <a:p>
-            <a:pPr>
-              <a:spcAft>
-                <a:spcPts val="600"/>
-              </a:spcAft>
-            </a:pPr>
-            <a:r>
-              <a:rPr sz="1500">
-                <a:solidFill>
-                  <a:srgbClr val="22282E"/>
-                </a:solidFill>
-              </a:rPr>
-              <a:t>•  Explica la diferencia entre -sS (SYN) y -sT (connect) en nmap y sus implicaciones de sigilo.</a:t>
-            </a:r>
-          </a:p>
-          <a:p>
-            <a:pPr>
-              <a:spcAft>
-                <a:spcPts val="600"/>
-              </a:spcAft>
-            </a:pPr>
-            <a:r>
-              <a:rPr sz="1500">
-                <a:solidFill>
-                  <a:srgbClr val="22282E"/>
-                </a:solidFill>
-              </a:rPr>
-              <a:t>•  Describe cómo ICMP puede usarse para exfiltrar datos (túnel ICMP) y cómo detectarlo.</a:t>
+              <a:t>•  Trabaja siempre en un laboratorio aislado (VMs en red interna, nunca contra terceros). Usa Wireshark para el análisis visual paquete a paquete, tcpdump para capturas rápidas desde la terminal, y nmap…</a:t>
             </a:r>
           </a:p>
         </p:txBody>
@@ -4643,7 +5094,7 @@
                   <a:srgbClr val="0B3D2E"/>
                 </a:solidFill>
               </a:rPr>
-              <a:t>📝 Reto verificable</a:t>
+              <a:t>🧪 Laboratorio guiado</a:t>
             </a:r>
           </a:p>
         </p:txBody>
@@ -4681,22 +5132,97 @@
                   <a:srgbClr val="22282E"/>
                 </a:solidFill>
               </a:rPr>
-              <a:t>•  Realiza y documenta un escaneo comparativo contra tu VM víctima: un SYN scan y un connect scan sobre el mismo rango, capturando ambos en Wireshark. Entrega una tabla que muestre, para 3 puertos (uno abierto, uno cerrado, uno filtrado), qué paquetes se intercambiaron en cada tipo de escaneo.</a:t>
-            </a:r>
-          </a:p>
-          <a:p>
-            <a:pPr>
-              <a:spcAft>
-                <a:spcPts val="600"/>
-              </a:spcAft>
-            </a:pPr>
-            <a:r>
-              <a:rPr sz="1500">
-                <a:solidFill>
-                  <a:srgbClr val="22282E"/>
-                </a:solidFill>
-              </a:rPr>
-              <a:t>•  Criterio de aceptación: la tabla refleja correctamente las respuestas (SYN-ACK/RST/sin respuesta) y explica por qué el SYN scan no completa el handshake mientras el connect sí. Las capturas adjuntas respaldan cada fila.</a:t>
+              <a:t>•  Capturar un handshake. En Kali, arranca la captura y luego conéctate a un servicio de la víctima:</a:t>
+            </a:r>
+          </a:p>
+          <a:p>
+            <a:pPr>
+              <a:spcAft>
+                <a:spcPts val="600"/>
+              </a:spcAft>
+            </a:pPr>
+            <a:r>
+              <a:rPr sz="1500">
+                <a:solidFill>
+                  <a:srgbClr val="22282E"/>
+                </a:solidFill>
+              </a:rPr>
+              <a:t>•  Analiza en Wireshark con el filtro tcp.flags.syn == 1. Identifica SYN, SYN-ACK y ACK, y anota los números de secuencia y los puertos de origen y destino.</a:t>
+            </a:r>
+          </a:p>
+          <a:p>
+            <a:pPr>
+              <a:spcAft>
+                <a:spcPts val="600"/>
+              </a:spcAft>
+            </a:pPr>
+            <a:r>
+              <a:rPr sz="1500">
+                <a:solidFill>
+                  <a:srgbClr val="22282E"/>
+                </a:solidFill>
+              </a:rPr>
+              <a:t>•  Cierre de conexión. Localiza los paquetes FIN/ACK (o el RST) al final de la conversación y contrástalos con el diagrama de secuencia de esta clase.</a:t>
+            </a:r>
+          </a:p>
+          <a:p>
+            <a:pPr>
+              <a:spcAft>
+                <a:spcPts val="600"/>
+              </a:spcAft>
+            </a:pPr>
+            <a:r>
+              <a:rPr sz="1500">
+                <a:solidFill>
+                  <a:srgbClr val="22282E"/>
+                </a:solidFill>
+              </a:rPr>
+              <a:t>•  Escaneo SYN (half-open) contra tu víctima, capturando en paralelo:</a:t>
+            </a:r>
+          </a:p>
+          <a:p>
+            <a:pPr>
+              <a:spcAft>
+                <a:spcPts val="600"/>
+              </a:spcAft>
+            </a:pPr>
+            <a:r>
+              <a:rPr sz="1500">
+                <a:solidFill>
+                  <a:srgbClr val="22282E"/>
+                </a:solidFill>
+              </a:rPr>
+              <a:t>•  Observa que a los puertos cerrados llega RST y a los abiertos, SYN-ACK seguido de un RST del escáner.</a:t>
+            </a:r>
+          </a:p>
+          <a:p>
+            <a:pPr>
+              <a:spcAft>
+                <a:spcPts val="600"/>
+              </a:spcAft>
+            </a:pPr>
+            <a:r>
+              <a:rPr sz="1500">
+                <a:solidFill>
+                  <a:srgbClr val="22282E"/>
+                </a:solidFill>
+              </a:rPr>
+              <a:t>•  UDP e ICMP. Lanza un ping y un escaneo UDP:</a:t>
+            </a:r>
+          </a:p>
+          <a:p>
+            <a:pPr>
+              <a:spcAft>
+                <a:spcPts val="600"/>
+              </a:spcAft>
+            </a:pPr>
+            <a:r>
+              <a:rPr sz="1500">
+                <a:solidFill>
+                  <a:srgbClr val="22282E"/>
+                </a:solidFill>
+              </a:rPr>
+              <a:t>•  Observa las respuestas ICMP "port unreachable" que delatan los puertos UDP cerrados.</a:t>
             </a:r>
           </a:p>
         </p:txBody>
